--- a/template/Showreel展示文稿模板.pptx
+++ b/template/Showreel展示文稿模板.pptx
@@ -115,6 +115,11 @@
       </a:defRPr>
     </a:lvl9pPr>
   </p:defaultTextStyle>
+  <p:extLst>
+    <p:ext uri="{EFAFB233-063F-42B5-8137-9DF3F51BA10A}">
+      <p15:sldGuideLst xmlns:p15="http://schemas.microsoft.com/office/powerpoint/2012/main"/>
+    </p:ext>
+  </p:extLst>
 </p:presentation>
 </file>
 
@@ -200,7 +205,7 @@
           <a:p>
             <a:fld id="{3FF6EB09-D86E-4714-9A8B-8C3449D87C08}" type="datetimeFigureOut">
               <a:rPr lang="zh-CN" altLang="en-US" smtClean="0"/>
-              <a:t>2026/6/25</a:t>
+              <a:t>2026/6/29</a:t>
             </a:fld>
             <a:endParaRPr lang="zh-CN" altLang="en-US"/>
           </a:p>
@@ -2017,7 +2022,7 @@
           <a:p>
             <a:fld id="{03586578-0A30-4C0A-AC72-DF5A48739216}" type="datetimeFigureOut">
               <a:rPr lang="zh-CN" altLang="en-US" smtClean="0"/>
-              <a:t>2026/6/25</a:t>
+              <a:t>2026/6/29</a:t>
             </a:fld>
             <a:endParaRPr lang="zh-CN" altLang="en-US"/>
           </a:p>
@@ -2215,7 +2220,7 @@
           <a:p>
             <a:fld id="{03586578-0A30-4C0A-AC72-DF5A48739216}" type="datetimeFigureOut">
               <a:rPr lang="zh-CN" altLang="en-US" smtClean="0"/>
-              <a:t>2026/6/25</a:t>
+              <a:t>2026/6/29</a:t>
             </a:fld>
             <a:endParaRPr lang="zh-CN" altLang="en-US"/>
           </a:p>
@@ -2423,7 +2428,7 @@
           <a:p>
             <a:fld id="{03586578-0A30-4C0A-AC72-DF5A48739216}" type="datetimeFigureOut">
               <a:rPr lang="zh-CN" altLang="en-US" smtClean="0"/>
-              <a:t>2026/6/25</a:t>
+              <a:t>2026/6/29</a:t>
             </a:fld>
             <a:endParaRPr lang="zh-CN" altLang="en-US"/>
           </a:p>
@@ -2621,7 +2626,7 @@
           <a:p>
             <a:fld id="{03586578-0A30-4C0A-AC72-DF5A48739216}" type="datetimeFigureOut">
               <a:rPr lang="zh-CN" altLang="en-US" smtClean="0"/>
-              <a:t>2026/6/25</a:t>
+              <a:t>2026/6/29</a:t>
             </a:fld>
             <a:endParaRPr lang="zh-CN" altLang="en-US"/>
           </a:p>
@@ -2896,7 +2901,7 @@
           <a:p>
             <a:fld id="{03586578-0A30-4C0A-AC72-DF5A48739216}" type="datetimeFigureOut">
               <a:rPr lang="zh-CN" altLang="en-US" smtClean="0"/>
-              <a:t>2026/6/25</a:t>
+              <a:t>2026/6/29</a:t>
             </a:fld>
             <a:endParaRPr lang="zh-CN" altLang="en-US"/>
           </a:p>
@@ -3161,7 +3166,7 @@
           <a:p>
             <a:fld id="{03586578-0A30-4C0A-AC72-DF5A48739216}" type="datetimeFigureOut">
               <a:rPr lang="zh-CN" altLang="en-US" smtClean="0"/>
-              <a:t>2026/6/25</a:t>
+              <a:t>2026/6/29</a:t>
             </a:fld>
             <a:endParaRPr lang="zh-CN" altLang="en-US"/>
           </a:p>
@@ -3573,7 +3578,7 @@
           <a:p>
             <a:fld id="{03586578-0A30-4C0A-AC72-DF5A48739216}" type="datetimeFigureOut">
               <a:rPr lang="zh-CN" altLang="en-US" smtClean="0"/>
-              <a:t>2026/6/25</a:t>
+              <a:t>2026/6/29</a:t>
             </a:fld>
             <a:endParaRPr lang="zh-CN" altLang="en-US"/>
           </a:p>
@@ -3714,7 +3719,7 @@
           <a:p>
             <a:fld id="{03586578-0A30-4C0A-AC72-DF5A48739216}" type="datetimeFigureOut">
               <a:rPr lang="zh-CN" altLang="en-US" smtClean="0"/>
-              <a:t>2026/6/25</a:t>
+              <a:t>2026/6/29</a:t>
             </a:fld>
             <a:endParaRPr lang="zh-CN" altLang="en-US"/>
           </a:p>
@@ -3827,7 +3832,7 @@
           <a:p>
             <a:fld id="{03586578-0A30-4C0A-AC72-DF5A48739216}" type="datetimeFigureOut">
               <a:rPr lang="zh-CN" altLang="en-US" smtClean="0"/>
-              <a:t>2026/6/25</a:t>
+              <a:t>2026/6/29</a:t>
             </a:fld>
             <a:endParaRPr lang="zh-CN" altLang="en-US"/>
           </a:p>
@@ -4138,7 +4143,7 @@
           <a:p>
             <a:fld id="{03586578-0A30-4C0A-AC72-DF5A48739216}" type="datetimeFigureOut">
               <a:rPr lang="zh-CN" altLang="en-US" smtClean="0"/>
-              <a:t>2026/6/25</a:t>
+              <a:t>2026/6/29</a:t>
             </a:fld>
             <a:endParaRPr lang="zh-CN" altLang="en-US"/>
           </a:p>
@@ -4426,7 +4431,7 @@
           <a:p>
             <a:fld id="{03586578-0A30-4C0A-AC72-DF5A48739216}" type="datetimeFigureOut">
               <a:rPr lang="zh-CN" altLang="en-US" smtClean="0"/>
-              <a:t>2026/6/25</a:t>
+              <a:t>2026/6/29</a:t>
             </a:fld>
             <a:endParaRPr lang="zh-CN" altLang="en-US"/>
           </a:p>
@@ -4667,7 +4672,7 @@
           <a:p>
             <a:fld id="{03586578-0A30-4C0A-AC72-DF5A48739216}" type="datetimeFigureOut">
               <a:rPr lang="zh-CN" altLang="en-US" smtClean="0"/>
-              <a:t>2026/6/25</a:t>
+              <a:t>2026/6/29</a:t>
             </a:fld>
             <a:endParaRPr lang="zh-CN" altLang="en-US"/>
           </a:p>
@@ -6806,42 +6811,41 @@
                 <a:latin typeface="+mj-ea"/>
                 <a:ea typeface="+mj-ea"/>
               </a:rPr>
-              <a:t>/ </a:t>
+              <a:t>/ AI</a:t>
             </a:r>
             <a:r>
               <a:rPr lang="zh-CN" altLang="en-US" sz="1400" dirty="0">
                 <a:latin typeface="+mj-ea"/>
                 <a:ea typeface="+mj-ea"/>
               </a:rPr>
-              <a:t>算法工程</a:t>
-            </a:r>
-            <a:endParaRPr lang="en-US" altLang="zh-CN" sz="1400" dirty="0">
-              <a:latin typeface="+mj-ea"/>
-              <a:ea typeface="+mj-ea"/>
-            </a:endParaRPr>
-          </a:p>
-          <a:p>
-            <a:pPr algn="r"/>
+              <a:t> </a:t>
+            </a:r>
+            <a:r>
+              <a:rPr lang="en-US" altLang="zh-CN" sz="1400" dirty="0">
+                <a:latin typeface="+mj-ea"/>
+                <a:ea typeface="+mj-ea"/>
+              </a:rPr>
+              <a:t>&amp;</a:t>
+            </a:r>
             <a:r>
               <a:rPr lang="zh-CN" altLang="en-US" sz="1400" dirty="0">
                 <a:latin typeface="+mj-ea"/>
                 <a:ea typeface="+mj-ea"/>
               </a:rPr>
-              <a:t>企业学术两头抓的</a:t>
-            </a:r>
-            <a:r>
+              <a:t> 算法</a:t>
+            </a:r>
+            <a:br>
               <a:rPr lang="en-US" altLang="zh-CN" sz="1400" dirty="0">
                 <a:latin typeface="+mj-ea"/>
                 <a:ea typeface="+mj-ea"/>
               </a:rPr>
-              <a:t>CS</a:t>
-            </a:r>
+            </a:br>
             <a:r>
               <a:rPr lang="zh-CN" altLang="en-US" sz="1400" dirty="0">
                 <a:latin typeface="+mj-ea"/>
                 <a:ea typeface="+mj-ea"/>
               </a:rPr>
-              <a:t>大佬</a:t>
+              <a:t>保持饥饿 持续学习</a:t>
             </a:r>
             <a:endParaRPr lang="en-US" altLang="zh-CN" sz="1400" dirty="0">
               <a:latin typeface="+mj-ea"/>
@@ -12553,12 +12557,10 @@
           </a:p>
           <a:p>
             <a:r>
-              <a:rPr lang="en-US" altLang="zh-CN" sz="1400" dirty="0">
-                <a:latin typeface="+mj-ea"/>
-                <a:ea typeface="+mj-ea"/>
-              </a:rPr>
-              <a:t>1111111111@zju.edu.cn</a:t>
-            </a:r>
+              <a:rPr lang="en" altLang="zh-CN" sz="1400" dirty="0" err="1"/>
+              <a:t>ziyi_wang@zju.edu.cn</a:t>
+            </a:r>
+            <a:endParaRPr lang="en" altLang="zh-CN" sz="1400" dirty="0"/>
           </a:p>
         </p:txBody>
       </p:sp>
@@ -12577,7 +12579,7 @@
         <p:spPr>
           <a:xfrm>
             <a:off x="4760819" y="4046310"/>
-            <a:ext cx="2583152" cy="830997"/>
+            <a:ext cx="2583152" cy="1046440"/>
           </a:xfrm>
           <a:prstGeom prst="rect">
             <a:avLst/>
@@ -12641,8 +12643,22 @@
               <a:rPr lang="en-US" altLang="zh-CN" sz="1400" dirty="0">
                 <a:latin typeface="+mj-ea"/>
                 <a:ea typeface="+mj-ea"/>
-              </a:rPr>
-              <a:t>1111111111@zju.edu.cn</a:t>
+                <a:hlinkClick r:id="rId4"/>
+              </a:rPr>
+              <a:t>lfj@zju.edu.cn</a:t>
+            </a:r>
+            <a:br>
+              <a:rPr lang="en-US" altLang="zh-CN" sz="1400" dirty="0">
+                <a:latin typeface="+mj-ea"/>
+                <a:ea typeface="+mj-ea"/>
+              </a:rPr>
+            </a:br>
+            <a:r>
+              <a:rPr lang="en-US" altLang="zh-CN" sz="1400" dirty="0">
+                <a:latin typeface="+mj-ea"/>
+                <a:ea typeface="+mj-ea"/>
+              </a:rPr>
+              <a:t>fengjiel137@gmail.com</a:t>
             </a:r>
           </a:p>
         </p:txBody>
@@ -12661,7 +12677,7 @@
         </p:nvSpPr>
         <p:spPr>
           <a:xfrm>
-            <a:off x="2189013" y="4960427"/>
+            <a:off x="2203804" y="5186843"/>
             <a:ext cx="1608655" cy="1470458"/>
           </a:xfrm>
           <a:prstGeom prst="rect">
@@ -12721,7 +12737,7 @@
         </p:nvSpPr>
         <p:spPr>
           <a:xfrm>
-            <a:off x="5008413" y="4960427"/>
+            <a:off x="4910525" y="5195206"/>
             <a:ext cx="1608655" cy="1470458"/>
           </a:xfrm>
           <a:prstGeom prst="rect">
